--- a/10_Presentation/Final Presentation.pptx
+++ b/10_Presentation/Final Presentation.pptx
@@ -300,7 +300,7 @@
           <a:p>
             <a:fld id="{5BCAD085-E8A6-8845-BD4E-CB4CCA059FC4}" type="datetimeFigureOut">
               <a:rPr lang="en-US" smtClean="0"/>
-              <a:t>9/23/2026</a:t>
+              <a:t>9/25/2026</a:t>
             </a:fld>
             <a:endParaRPr lang="en-US"/>
           </a:p>
@@ -470,7 +470,7 @@
           <a:p>
             <a:fld id="{5BCAD085-E8A6-8845-BD4E-CB4CCA059FC4}" type="datetimeFigureOut">
               <a:rPr lang="en-US" smtClean="0"/>
-              <a:t>9/23/2026</a:t>
+              <a:t>9/25/2026</a:t>
             </a:fld>
             <a:endParaRPr lang="en-US"/>
           </a:p>
@@ -650,7 +650,7 @@
           <a:p>
             <a:fld id="{5BCAD085-E8A6-8845-BD4E-CB4CCA059FC4}" type="datetimeFigureOut">
               <a:rPr lang="en-US" smtClean="0"/>
-              <a:t>9/23/2026</a:t>
+              <a:t>9/25/2026</a:t>
             </a:fld>
             <a:endParaRPr lang="en-US"/>
           </a:p>
@@ -820,7 +820,7 @@
           <a:p>
             <a:fld id="{5BCAD085-E8A6-8845-BD4E-CB4CCA059FC4}" type="datetimeFigureOut">
               <a:rPr lang="en-US" smtClean="0"/>
-              <a:t>9/23/2026</a:t>
+              <a:t>9/25/2026</a:t>
             </a:fld>
             <a:endParaRPr lang="en-US"/>
           </a:p>
@@ -1066,7 +1066,7 @@
           <a:p>
             <a:fld id="{5BCAD085-E8A6-8845-BD4E-CB4CCA059FC4}" type="datetimeFigureOut">
               <a:rPr lang="en-US" smtClean="0"/>
-              <a:t>9/23/2026</a:t>
+              <a:t>9/25/2026</a:t>
             </a:fld>
             <a:endParaRPr lang="en-US"/>
           </a:p>
@@ -1354,7 +1354,7 @@
           <a:p>
             <a:fld id="{5BCAD085-E8A6-8845-BD4E-CB4CCA059FC4}" type="datetimeFigureOut">
               <a:rPr lang="en-US" smtClean="0"/>
-              <a:t>9/23/2026</a:t>
+              <a:t>9/25/2026</a:t>
             </a:fld>
             <a:endParaRPr lang="en-US"/>
           </a:p>
@@ -1776,7 +1776,7 @@
           <a:p>
             <a:fld id="{5BCAD085-E8A6-8845-BD4E-CB4CCA059FC4}" type="datetimeFigureOut">
               <a:rPr lang="en-US" smtClean="0"/>
-              <a:t>9/23/2026</a:t>
+              <a:t>9/25/2026</a:t>
             </a:fld>
             <a:endParaRPr lang="en-US"/>
           </a:p>
@@ -1894,7 +1894,7 @@
           <a:p>
             <a:fld id="{5BCAD085-E8A6-8845-BD4E-CB4CCA059FC4}" type="datetimeFigureOut">
               <a:rPr lang="en-US" smtClean="0"/>
-              <a:t>9/23/2026</a:t>
+              <a:t>9/25/2026</a:t>
             </a:fld>
             <a:endParaRPr lang="en-US"/>
           </a:p>
@@ -1989,7 +1989,7 @@
           <a:p>
             <a:fld id="{5BCAD085-E8A6-8845-BD4E-CB4CCA059FC4}" type="datetimeFigureOut">
               <a:rPr lang="en-US" smtClean="0"/>
-              <a:t>9/23/2026</a:t>
+              <a:t>9/25/2026</a:t>
             </a:fld>
             <a:endParaRPr lang="en-US"/>
           </a:p>
@@ -2266,7 +2266,7 @@
           <a:p>
             <a:fld id="{5BCAD085-E8A6-8845-BD4E-CB4CCA059FC4}" type="datetimeFigureOut">
               <a:rPr lang="en-US" smtClean="0"/>
-              <a:t>9/23/2026</a:t>
+              <a:t>9/25/2026</a:t>
             </a:fld>
             <a:endParaRPr lang="en-US"/>
           </a:p>
@@ -2519,7 +2519,7 @@
           <a:p>
             <a:fld id="{5BCAD085-E8A6-8845-BD4E-CB4CCA059FC4}" type="datetimeFigureOut">
               <a:rPr lang="en-US" smtClean="0"/>
-              <a:t>9/23/2026</a:t>
+              <a:t>9/25/2026</a:t>
             </a:fld>
             <a:endParaRPr lang="en-US"/>
           </a:p>
@@ -2732,7 +2732,7 @@
           <a:p>
             <a:fld id="{5BCAD085-E8A6-8845-BD4E-CB4CCA059FC4}" type="datetimeFigureOut">
               <a:rPr lang="en-US" smtClean="0"/>
-              <a:t>9/23/2026</a:t>
+              <a:t>9/25/2026</a:t>
             </a:fld>
             <a:endParaRPr lang="en-US"/>
           </a:p>
@@ -4205,7 +4205,7 @@
       </p:grpSpPr>
       <p:pic>
         <p:nvPicPr>
-          <p:cNvPr id="36" name="Picture 35"/>
+          <p:cNvPr id="2" name="Picture 1"/>
           <p:cNvPicPr>
             <a:picLocks noChangeAspect="1"/>
           </p:cNvPicPr>
@@ -4225,8 +4225,8 @@
         </p:blipFill>
         <p:spPr>
           <a:xfrm>
-            <a:off x="376015" y="320040"/>
-            <a:ext cx="11449799" cy="6320041"/>
+            <a:off x="605314" y="357873"/>
+            <a:ext cx="11264794" cy="6300780"/>
           </a:xfrm>
           <a:prstGeom prst="rect">
             <a:avLst/>
